--- a/skills/presentations/assets/pptx/templates/09-period-end-review.pptx
+++ b/skills/presentations/assets/pptx/templates/09-period-end-review.pptx
@@ -5,16 +5,16 @@
     <p:sldMasterId xmlns:r="http://schemas.openxmlformats.org/officeDocument/2006/relationships" id="2147483648" r:id="rId1"/>
   </p:sldMasterIdLst>
   <p:notesMasterIdLst>
-    <p:notesMasterId r:id="Rb65a47902cbc43c3"/>
+    <p:notesMasterId r:id="R2904d0e36f704a60"/>
   </p:notesMasterIdLst>
   <p:sldIdLst>
-    <p:sldId id="256" r:id="R65ba6bb277d347f0"/>
-    <p:sldId id="257" r:id="R7dff6e716e694fdf"/>
-    <p:sldId id="258" r:id="R674be68c99c34979"/>
-    <p:sldId id="259" r:id="R512fd0f4c6944020"/>
-    <p:sldId id="260" r:id="R249fcd292d1b4db0"/>
-    <p:sldId id="261" r:id="Red2d9ae5d7be46fe"/>
-    <p:sldId id="262" r:id="Rb4a3414fb26d4502"/>
+    <p:sldId id="256" r:id="R1980da5cd1f446c5"/>
+    <p:sldId id="257" r:id="Rd0cf98ea12f34dbe"/>
+    <p:sldId id="258" r:id="Rbced221812054b47"/>
+    <p:sldId id="259" r:id="R45c9a4d29e2b43a0"/>
+    <p:sldId id="260" r:id="R641ea98061f74c96"/>
+    <p:sldId id="261" r:id="R26d35039ead44a83"/>
+    <p:sldId id="262" r:id="R4922c7204898458d"/>
   </p:sldIdLst>
   <p:sldSz cx="12192000" cy="6858000"/>
   <p:notesSz cx="6858000" cy="9144000"/>

--- a/skills/presentations/assets/pptx/templates/09-period-end-review.pptx
+++ b/skills/presentations/assets/pptx/templates/09-period-end-review.pptx
@@ -5,16 +5,17 @@
     <p:sldMasterId xmlns:r="http://schemas.openxmlformats.org/officeDocument/2006/relationships" id="2147483648" r:id="rId1"/>
   </p:sldMasterIdLst>
   <p:notesMasterIdLst>
-    <p:notesMasterId r:id="R2904d0e36f704a60"/>
+    <p:notesMasterId r:id="R5a8bdc522ff74316"/>
   </p:notesMasterIdLst>
   <p:sldIdLst>
-    <p:sldId id="256" r:id="R1980da5cd1f446c5"/>
-    <p:sldId id="257" r:id="Rd0cf98ea12f34dbe"/>
-    <p:sldId id="258" r:id="Rbced221812054b47"/>
-    <p:sldId id="259" r:id="R45c9a4d29e2b43a0"/>
-    <p:sldId id="260" r:id="R641ea98061f74c96"/>
-    <p:sldId id="261" r:id="R26d35039ead44a83"/>
-    <p:sldId id="262" r:id="R4922c7204898458d"/>
+    <p:sldId id="256" r:id="R38989ba8a2fc4c0b"/>
+    <p:sldId id="257" r:id="R138bb6f96ad34bc1"/>
+    <p:sldId id="258" r:id="R0bbb62c3219d44f4"/>
+    <p:sldId id="259" r:id="R50f5e4a537774e8c"/>
+    <p:sldId id="260" r:id="Rb066a54198364fd4"/>
+    <p:sldId id="261" r:id="R9e6ca063702c40e6"/>
+    <p:sldId id="262" r:id="R9e05eeb79a8e4ba6"/>
+    <p:sldId id="263" r:id="Rb7dd4b3922494d00"/>
   </p:sldIdLst>
   <p:sldSz cx="12192000" cy="6858000"/>
   <p:notesSz cx="6858000" cy="9144000"/>
@@ -480,6 +481,30 @@
               <a:t>Cover (template). Period-end review (QBR)</a:t>
             </a:r>
           </a:p>
+          <a:p xmlns:a="http://schemas.openxmlformats.org/drawingml/2006/main">
+            <a:r>
+              <a:rPr lang="en-US"/>
+              <a:t/>
+            </a:r>
+          </a:p>
+          <a:p xmlns:a="http://schemas.openxmlformats.org/drawingml/2006/main">
+            <a:r>
+              <a:rPr lang="en-US"/>
+              <a:t>Leadership QBR scorecard → risks → asks</a:t>
+            </a:r>
+          </a:p>
+          <a:p xmlns:a="http://schemas.openxmlformats.org/drawingml/2006/main">
+            <a:r>
+              <a:rPr lang="en-US"/>
+              <a:t>SRE Book — example postmortem (impact honesty): https://sre.google/sre-book/example-postmortem/</a:t>
+            </a:r>
+          </a:p>
+          <a:p xmlns:a="http://schemas.openxmlformats.org/drawingml/2006/main">
+            <a:r>
+              <a:rPr lang="en-US"/>
+              <a:t>EM Tools — executive communication updates: https://www.em-tools.io/engineering-manager-responsibilities/executive-communication</a:t>
+            </a:r>
+          </a:p>
         </p:txBody>
       </p:sp>
     </p:spTree>
@@ -532,7 +557,19 @@
           <a:p xmlns:a="http://schemas.openxmlformats.org/drawingml/2006/main">
             <a:r>
               <a:rPr lang="en-US"/>
-              <a:t>Classic leadership QBR close.</a:t>
+              <a:t>Leadership QBR scorecard → risks → asks</a:t>
+            </a:r>
+          </a:p>
+          <a:p xmlns:a="http://schemas.openxmlformats.org/drawingml/2006/main">
+            <a:r>
+              <a:rPr lang="en-US"/>
+              <a:t>SRE Book — example postmortem (impact honesty): https://sre.google/sre-book/example-postmortem/</a:t>
+            </a:r>
+          </a:p>
+          <a:p xmlns:a="http://schemas.openxmlformats.org/drawingml/2006/main">
+            <a:r>
+              <a:rPr lang="en-US"/>
+              <a:t>EM Tools — executive communication updates: https://www.em-tools.io/engineering-manager-responsibilities/executive-communication</a:t>
             </a:r>
           </a:p>
         </p:txBody>
@@ -587,7 +624,7 @@
           <a:p xmlns:a="http://schemas.openxmlformats.org/drawingml/2006/main">
             <a:r>
               <a:rPr lang="en-US"/>
-              <a:t>Answer-first QBR spine.</a:t>
+              <a:t>Classic leadership QBR close.</a:t>
             </a:r>
           </a:p>
         </p:txBody>
@@ -642,7 +679,7 @@
           <a:p xmlns:a="http://schemas.openxmlformats.org/drawingml/2006/main">
             <a:r>
               <a:rPr lang="en-US"/>
-              <a:t>Root cause → system fix.</a:t>
+              <a:t>Answer-first QBR spine.</a:t>
             </a:r>
           </a:p>
         </p:txBody>
@@ -697,7 +734,7 @@
           <a:p xmlns:a="http://schemas.openxmlformats.org/drawingml/2006/main">
             <a:r>
               <a:rPr lang="en-US"/>
-              <a:t>Carry-forward must be owned.</a:t>
+              <a:t>Root cause → system fix.</a:t>
             </a:r>
           </a:p>
         </p:txBody>
@@ -752,7 +789,7 @@
           <a:p xmlns:a="http://schemas.openxmlformats.org/drawingml/2006/main">
             <a:r>
               <a:rPr lang="en-US"/>
-              <a:t>Walk trade-offs; land recommendation.</a:t>
+              <a:t>Carry-forward must be owned.</a:t>
             </a:r>
           </a:p>
         </p:txBody>
@@ -766,6 +803,61 @@
 </file>
 
 <file path=ppt/notesSlides/notesSlide7.xml><?xml version="1.0" encoding="utf-8"?>
+<p:notes xmlns:p="http://schemas.openxmlformats.org/presentationml/2006/main">
+  <p:cSld>
+    <p:spTree>
+      <p:nvGrpSpPr>
+        <p:cNvPr id="1" name=""/>
+        <p:cNvGrpSpPr/>
+        <p:nvPr/>
+      </p:nvGrpSpPr>
+      <p:grpSpPr>
+        <a:xfrm xmlns:a="http://schemas.openxmlformats.org/drawingml/2006/main"/>
+      </p:grpSpPr>
+      <p:sp>
+        <p:nvSpPr>
+          <p:cNvPr id="2" name="Slide Image Placeholder 1"/>
+          <p:cNvSpPr/>
+          <p:nvPr>
+            <p:ph type="sldImg" idx="0"/>
+          </p:nvPr>
+        </p:nvSpPr>
+        <p:spPr/>
+        <p:txBody>
+          <a:bodyPr xmlns:a="http://schemas.openxmlformats.org/drawingml/2006/main"/>
+          <a:lstStyle xmlns:a="http://schemas.openxmlformats.org/drawingml/2006/main"/>
+          <a:p xmlns:a="http://schemas.openxmlformats.org/drawingml/2006/main"/>
+        </p:txBody>
+      </p:sp>
+      <p:sp>
+        <p:nvSpPr>
+          <p:cNvPr id="3" name="Notes Placeholder 2"/>
+          <p:cNvSpPr/>
+          <p:nvPr>
+            <p:ph type="body" idx="1"/>
+          </p:nvPr>
+        </p:nvSpPr>
+        <p:spPr/>
+        <p:txBody>
+          <a:bodyPr xmlns:a="http://schemas.openxmlformats.org/drawingml/2006/main"/>
+          <a:lstStyle xmlns:a="http://schemas.openxmlformats.org/drawingml/2006/main"/>
+          <a:p xmlns:a="http://schemas.openxmlformats.org/drawingml/2006/main">
+            <a:r>
+              <a:rPr lang="en-US"/>
+              <a:t>Walk trade-offs; land recommendation.</a:t>
+            </a:r>
+          </a:p>
+        </p:txBody>
+      </p:sp>
+    </p:spTree>
+  </p:cSld>
+  <p:clrMapOvr>
+    <a:masterClrMapping xmlns:a="http://schemas.openxmlformats.org/drawingml/2006/main"/>
+  </p:clrMapOvr>
+</p:notes>
+</file>
+
+<file path=ppt/notesSlides/notesSlide8.xml><?xml version="1.0" encoding="utf-8"?>
 <p:notes xmlns:p="http://schemas.openxmlformats.org/presentationml/2006/main">
   <p:cSld>
     <p:spTree>
@@ -1135,8 +1227,8 @@
         </p:nvSpPr>
         <p:spPr>
           <a:xfrm xmlns:a="http://schemas.openxmlformats.org/drawingml/2006/main">
-            <a:off x="504000" y="1008000"/>
-            <a:ext cx="11088000" cy="324000"/>
+            <a:off x="504000" y="936000"/>
+            <a:ext cx="11088000" cy="306000"/>
           </a:xfrm>
           <a:prstGeom xmlns:a="http://schemas.openxmlformats.org/drawingml/2006/main" prst="rect">
             <a:avLst/>
@@ -1167,8 +1259,8 @@
         </p:nvSpPr>
         <p:spPr>
           <a:xfrm xmlns:a="http://schemas.openxmlformats.org/drawingml/2006/main">
-            <a:off x="504000" y="1440000"/>
-            <a:ext cx="11088000" cy="936000"/>
+            <a:off x="504000" y="1332000"/>
+            <a:ext cx="11088000" cy="900000"/>
           </a:xfrm>
           <a:prstGeom xmlns:a="http://schemas.openxmlformats.org/drawingml/2006/main" prst="rect">
             <a:avLst/>
@@ -1179,7 +1271,7 @@
           <a:lstStyle xmlns:a="http://schemas.openxmlformats.org/drawingml/2006/main"/>
           <a:p xmlns:a="http://schemas.openxmlformats.org/drawingml/2006/main">
             <a:r>
-              <a:rPr lang="en-US" sz="3400" b="1">
+              <a:rPr lang="en-US" sz="3200" b="1">
                 <a:solidFill>
                   <a:srgbClr val="FFFFFF"/>
                 </a:solidFill>
@@ -1199,8 +1291,8 @@
         </p:nvSpPr>
         <p:spPr>
           <a:xfrm xmlns:a="http://schemas.openxmlformats.org/drawingml/2006/main">
-            <a:off x="504000" y="2520000"/>
-            <a:ext cx="11088000" cy="720000"/>
+            <a:off x="504000" y="2340000"/>
+            <a:ext cx="11088000" cy="648000"/>
           </a:xfrm>
           <a:prstGeom xmlns:a="http://schemas.openxmlformats.org/drawingml/2006/main" prst="rect">
             <a:avLst/>
@@ -1211,7 +1303,7 @@
           <a:lstStyle xmlns:a="http://schemas.openxmlformats.org/drawingml/2006/main"/>
           <a:p xmlns:a="http://schemas.openxmlformats.org/drawingml/2006/main">
             <a:r>
-              <a:rPr lang="en-US" sz="1700" b="0">
+              <a:rPr lang="en-US" sz="1600" b="0">
                 <a:solidFill>
                   <a:srgbClr val="CADCFC"/>
                 </a:solidFill>
@@ -1226,6 +1318,38 @@
       <p:sp>
         <p:nvSpPr>
           <p:cNvPr id="100003" name="TextBox 4"/>
+          <p:cNvSpPr txBox="1"/>
+          <p:nvPr/>
+        </p:nvSpPr>
+        <p:spPr>
+          <a:xfrm xmlns:a="http://schemas.openxmlformats.org/drawingml/2006/main">
+            <a:off x="504000" y="3240000"/>
+            <a:ext cx="11088000" cy="576000"/>
+          </a:xfrm>
+          <a:prstGeom xmlns:a="http://schemas.openxmlformats.org/drawingml/2006/main" prst="rect">
+            <a:avLst/>
+          </a:prstGeom>
+        </p:spPr>
+        <p:txBody>
+          <a:bodyPr xmlns:a="http://schemas.openxmlformats.org/drawingml/2006/main"/>
+          <a:lstStyle xmlns:a="http://schemas.openxmlformats.org/drawingml/2006/main"/>
+          <a:p xmlns:a="http://schemas.openxmlformats.org/drawingml/2006/main">
+            <a:r>
+              <a:rPr lang="en-US" sz="1400" b="0">
+                <a:solidFill>
+                  <a:srgbClr val="A0C4E8"/>
+                </a:solidFill>
+                <a:latin typeface="Calibri"/>
+                <a:ea typeface="Calibri"/>
+              </a:rPr>
+              <a:t>Pattern: Leadership QBR scorecard → risks → asks</a:t>
+            </a:r>
+          </a:p>
+        </p:txBody>
+      </p:sp>
+      <p:sp>
+        <p:nvSpPr>
+          <p:cNvPr id="100004" name="TextBox 5"/>
           <p:cNvSpPr txBox="1"/>
           <p:nvPr/>
         </p:nvSpPr>
@@ -1261,6 +1385,279 @@
 </file>
 
 <file path=ppt/slides/slide2.xml><?xml version="1.0" encoding="utf-8"?>
+<p:sld xmlns:p="http://schemas.openxmlformats.org/presentationml/2006/main">
+  <p:cSld name="Pattern provenance">
+    <p:bg>
+      <p:bgPr>
+        <a:solidFill xmlns:a="http://schemas.openxmlformats.org/drawingml/2006/main">
+          <a:srgbClr val="F4F7FC"/>
+        </a:solidFill>
+      </p:bgPr>
+    </p:bg>
+    <p:spTree>
+      <p:nvGrpSpPr>
+        <p:cNvPr id="1" name=""/>
+        <p:cNvGrpSpPr/>
+        <p:nvPr/>
+      </p:nvGrpSpPr>
+      <p:grpSpPr/>
+      <p:sp>
+        <p:nvSpPr>
+          <p:cNvPr id="100005" name="TextBox 1"/>
+          <p:cNvSpPr txBox="1"/>
+          <p:nvPr/>
+        </p:nvSpPr>
+        <p:spPr>
+          <a:xfrm xmlns:a="http://schemas.openxmlformats.org/drawingml/2006/main">
+            <a:off x="504000" y="270000"/>
+            <a:ext cx="11088000" cy="270000"/>
+          </a:xfrm>
+          <a:prstGeom xmlns:a="http://schemas.openxmlformats.org/drawingml/2006/main" prst="rect">
+            <a:avLst/>
+          </a:prstGeom>
+        </p:spPr>
+        <p:txBody>
+          <a:bodyPr xmlns:a="http://schemas.openxmlformats.org/drawingml/2006/main"/>
+          <a:lstStyle xmlns:a="http://schemas.openxmlformats.org/drawingml/2006/main"/>
+          <a:p xmlns:a="http://schemas.openxmlformats.org/drawingml/2006/main">
+            <a:r>
+              <a:rPr lang="en-US" sz="1100" b="1">
+                <a:solidFill>
+                  <a:srgbClr val="2B6CB0"/>
+                </a:solidFill>
+                <a:latin typeface="Calibri"/>
+                <a:ea typeface="Calibri"/>
+              </a:rPr>
+              <a:t>WHERE THIS DECK SHAPE COMES FROM</a:t>
+            </a:r>
+          </a:p>
+        </p:txBody>
+      </p:sp>
+      <p:sp>
+        <p:nvSpPr>
+          <p:cNvPr id="100006" name="TextBox 2"/>
+          <p:cNvSpPr txBox="1"/>
+          <p:nvPr/>
+        </p:nvSpPr>
+        <p:spPr>
+          <a:xfrm xmlns:a="http://schemas.openxmlformats.org/drawingml/2006/main">
+            <a:off x="504000" y="558000"/>
+            <a:ext cx="11088000" cy="612000"/>
+          </a:xfrm>
+          <a:prstGeom xmlns:a="http://schemas.openxmlformats.org/drawingml/2006/main" prst="rect">
+            <a:avLst/>
+          </a:prstGeom>
+        </p:spPr>
+        <p:txBody>
+          <a:bodyPr xmlns:a="http://schemas.openxmlformats.org/drawingml/2006/main"/>
+          <a:lstStyle xmlns:a="http://schemas.openxmlformats.org/drawingml/2006/main"/>
+          <a:p xmlns:a="http://schemas.openxmlformats.org/drawingml/2006/main">
+            <a:r>
+              <a:rPr lang="en-US" sz="2800" b="1">
+                <a:solidFill>
+                  <a:srgbClr val="1A202C"/>
+                </a:solidFill>
+                <a:latin typeface="Calibri"/>
+                <a:ea typeface="Calibri"/>
+              </a:rPr>
+              <a:t>Pattern provenance</a:t>
+            </a:r>
+          </a:p>
+        </p:txBody>
+      </p:sp>
+      <p:sp>
+        <p:nvSpPr>
+          <p:cNvPr id="100007" name="TextBox 3"/>
+          <p:cNvSpPr txBox="1"/>
+          <p:nvPr/>
+        </p:nvSpPr>
+        <p:spPr>
+          <a:xfrm xmlns:a="http://schemas.openxmlformats.org/drawingml/2006/main">
+            <a:off x="504000" y="1260000"/>
+            <a:ext cx="11088000" cy="4860000"/>
+          </a:xfrm>
+          <a:prstGeom xmlns:a="http://schemas.openxmlformats.org/drawingml/2006/main" prst="rect">
+            <a:avLst/>
+          </a:prstGeom>
+          <a:solidFill xmlns:a="http://schemas.openxmlformats.org/drawingml/2006/main">
+            <a:srgbClr val="FFFFFF"/>
+          </a:solidFill>
+        </p:spPr>
+        <p:txBody>
+          <a:bodyPr xmlns:a="http://schemas.openxmlformats.org/drawingml/2006/main"/>
+          <a:lstStyle xmlns:a="http://schemas.openxmlformats.org/drawingml/2006/main"/>
+          <a:p xmlns:a="http://schemas.openxmlformats.org/drawingml/2006/main">
+            <a:r>
+              <a:rPr lang="en-US" sz="1500" b="0">
+                <a:solidFill>
+                  <a:srgbClr val="1A202C"/>
+                </a:solidFill>
+                <a:latin typeface="Calibri"/>
+                <a:ea typeface="Calibri"/>
+              </a:rPr>
+              <a:t>Public pattern (structure only — not a confidential company deck):</a:t>
+            </a:r>
+          </a:p>
+          <a:p xmlns:a="http://schemas.openxmlformats.org/drawingml/2006/main">
+            <a:r>
+              <a:rPr lang="en-US" sz="1500" b="0">
+                <a:solidFill>
+                  <a:srgbClr val="1A202C"/>
+                </a:solidFill>
+                <a:latin typeface="Calibri"/>
+                <a:ea typeface="Calibri"/>
+              </a:rPr>
+              <a:t/>
+            </a:r>
+          </a:p>
+          <a:p xmlns:a="http://schemas.openxmlformats.org/drawingml/2006/main">
+            <a:r>
+              <a:rPr lang="en-US" sz="1500" b="0">
+                <a:solidFill>
+                  <a:srgbClr val="1A202C"/>
+                </a:solidFill>
+                <a:latin typeface="Calibri"/>
+                <a:ea typeface="Calibri"/>
+              </a:rPr>
+              <a:t>Leadership QBR scorecard → risks → asks</a:t>
+            </a:r>
+          </a:p>
+          <a:p xmlns:a="http://schemas.openxmlformats.org/drawingml/2006/main">
+            <a:r>
+              <a:rPr lang="en-US" sz="1500" b="0">
+                <a:solidFill>
+                  <a:srgbClr val="1A202C"/>
+                </a:solidFill>
+                <a:latin typeface="Calibri"/>
+                <a:ea typeface="Calibri"/>
+              </a:rPr>
+              <a:t/>
+            </a:r>
+          </a:p>
+          <a:p xmlns:a="http://schemas.openxmlformats.org/drawingml/2006/main">
+            <a:r>
+              <a:rPr lang="en-US" sz="1500" b="0">
+                <a:solidFill>
+                  <a:srgbClr val="1A202C"/>
+                </a:solidFill>
+                <a:latin typeface="Calibri"/>
+                <a:ea typeface="Calibri"/>
+              </a:rPr>
+              <a:t>• SRE Book — example postmortem (impact honesty)</a:t>
+            </a:r>
+          </a:p>
+          <a:p xmlns:a="http://schemas.openxmlformats.org/drawingml/2006/main">
+            <a:r>
+              <a:rPr lang="en-US" sz="1500" b="0">
+                <a:solidFill>
+                  <a:srgbClr val="1A202C"/>
+                </a:solidFill>
+                <a:latin typeface="Calibri"/>
+                <a:ea typeface="Calibri"/>
+              </a:rPr>
+              <a:t>  https://sre.google/sre-book/example-postmortem/</a:t>
+            </a:r>
+          </a:p>
+          <a:p xmlns:a="http://schemas.openxmlformats.org/drawingml/2006/main">
+            <a:r>
+              <a:rPr lang="en-US" sz="1500" b="0">
+                <a:solidFill>
+                  <a:srgbClr val="1A202C"/>
+                </a:solidFill>
+                <a:latin typeface="Calibri"/>
+                <a:ea typeface="Calibri"/>
+              </a:rPr>
+              <a:t>• EM Tools — executive communication updates</a:t>
+            </a:r>
+          </a:p>
+          <a:p xmlns:a="http://schemas.openxmlformats.org/drawingml/2006/main">
+            <a:r>
+              <a:rPr lang="en-US" sz="1500" b="0">
+                <a:solidFill>
+                  <a:srgbClr val="1A202C"/>
+                </a:solidFill>
+                <a:latin typeface="Calibri"/>
+                <a:ea typeface="Calibri"/>
+              </a:rPr>
+              <a:t>  https://www.em-tools.io/engineering-manager-responsibilities/executive-communication</a:t>
+            </a:r>
+          </a:p>
+          <a:p xmlns:a="http://schemas.openxmlformats.org/drawingml/2006/main">
+            <a:r>
+              <a:rPr lang="en-US" sz="1500" b="0">
+                <a:solidFill>
+                  <a:srgbClr val="1A202C"/>
+                </a:solidFill>
+                <a:latin typeface="Calibri"/>
+                <a:ea typeface="Calibri"/>
+              </a:rPr>
+              <a:t/>
+            </a:r>
+          </a:p>
+          <a:p xmlns:a="http://schemas.openxmlformats.org/drawingml/2006/main">
+            <a:r>
+              <a:rPr lang="en-US" sz="1500" b="0">
+                <a:solidFill>
+                  <a:srgbClr val="1A202C"/>
+                </a:solidFill>
+                <a:latin typeface="Calibri"/>
+                <a:ea typeface="Calibri"/>
+              </a:rPr>
+              <a:t>How to use: copy section order and decision verbs; replace with your metrics.</a:t>
+            </a:r>
+          </a:p>
+          <a:p xmlns:a="http://schemas.openxmlformats.org/drawingml/2006/main">
+            <a:r>
+              <a:rPr lang="en-US" sz="1500" b="0">
+                <a:solidFill>
+                  <a:srgbClr val="1A202C"/>
+                </a:solidFill>
+                <a:latin typeface="Calibri"/>
+                <a:ea typeface="Calibri"/>
+              </a:rPr>
+              <a:t>In-repo: skills/presentations/classic-public-cases.md</a:t>
+            </a:r>
+          </a:p>
+        </p:txBody>
+      </p:sp>
+      <p:sp>
+        <p:nvSpPr>
+          <p:cNvPr id="100008" name="TextBox 4"/>
+          <p:cNvSpPr txBox="1"/>
+          <p:nvPr/>
+        </p:nvSpPr>
+        <p:spPr>
+          <a:xfrm xmlns:a="http://schemas.openxmlformats.org/drawingml/2006/main">
+            <a:off x="504000" y="6426000"/>
+            <a:ext cx="11088000" cy="306000"/>
+          </a:xfrm>
+          <a:prstGeom xmlns:a="http://schemas.openxmlformats.org/drawingml/2006/main" prst="rect">
+            <a:avLst/>
+          </a:prstGeom>
+        </p:spPr>
+        <p:txBody>
+          <a:bodyPr xmlns:a="http://schemas.openxmlformats.org/drawingml/2006/main"/>
+          <a:lstStyle xmlns:a="http://schemas.openxmlformats.org/drawingml/2006/main"/>
+          <a:p xmlns:a="http://schemas.openxmlformats.org/drawingml/2006/main">
+            <a:r>
+              <a:rPr lang="en-US" sz="1100" b="0">
+                <a:solidFill>
+                  <a:srgbClr val="718096"/>
+                </a:solidFill>
+                <a:latin typeface="Calibri"/>
+                <a:ea typeface="Calibri"/>
+              </a:rPr>
+              <a:t>Team X  ·  Program Alpha  ·  Qn YYYY  ·  TEMPLATE — replace placeholders</a:t>
+            </a:r>
+          </a:p>
+        </p:txBody>
+      </p:sp>
+    </p:spTree>
+  </p:cSld>
+</p:sld>
+</file>
+
+<file path=ppt/slides/slide3.xml><?xml version="1.0" encoding="utf-8"?>
 <p:sld xmlns:p="http://schemas.openxmlformats.org/presentationml/2006/main">
   <p:cSld name="BLUF — quarter / period status">
     <p:bg>
@@ -1279,7 +1676,7 @@
       <p:grpSpPr/>
       <p:sp>
         <p:nvSpPr>
-          <p:cNvPr id="100004" name="TextBox 1"/>
+          <p:cNvPr id="100009" name="TextBox 1"/>
           <p:cNvSpPr txBox="1"/>
           <p:nvPr/>
         </p:nvSpPr>
@@ -1311,7 +1708,7 @@
       </p:sp>
       <p:sp>
         <p:nvSpPr>
-          <p:cNvPr id="100005" name="TextBox 2"/>
+          <p:cNvPr id="100010" name="TextBox 2"/>
           <p:cNvSpPr txBox="1"/>
           <p:nvPr/>
         </p:nvSpPr>
@@ -1343,7 +1740,7 @@
       </p:sp>
       <p:sp>
         <p:nvSpPr>
-          <p:cNvPr id="100006" name="TextBox 3"/>
+          <p:cNvPr id="100011" name="TextBox 3"/>
           <p:cNvSpPr txBox="1"/>
           <p:nvPr/>
         </p:nvSpPr>
@@ -1378,7 +1775,7 @@
       </p:sp>
       <p:sp>
         <p:nvSpPr>
-          <p:cNvPr id="100007" name="TextBox 4"/>
+          <p:cNvPr id="100012" name="TextBox 4"/>
           <p:cNvSpPr txBox="1"/>
           <p:nvPr/>
         </p:nvSpPr>
@@ -1437,7 +1834,7 @@
       </p:sp>
       <p:sp>
         <p:nvSpPr>
-          <p:cNvPr id="100008" name="TextBox 5"/>
+          <p:cNvPr id="100013" name="TextBox 5"/>
           <p:cNvSpPr txBox="1"/>
           <p:nvPr/>
         </p:nvSpPr>
@@ -1472,7 +1869,7 @@
 </p:sld>
 </file>
 
-<file path=ppt/slides/slide3.xml><?xml version="1.0" encoding="utf-8"?>
+<file path=ppt/slides/slide4.xml><?xml version="1.0" encoding="utf-8"?>
 <p:sld xmlns:p="http://schemas.openxmlformats.org/presentationml/2006/main">
   <p:cSld name="Scorecard vs commits">
     <p:bg>
@@ -1491,7 +1888,7 @@
       <p:grpSpPr/>
       <p:sp>
         <p:nvSpPr>
-          <p:cNvPr id="100009" name="TextBox 1"/>
+          <p:cNvPr id="100014" name="TextBox 1"/>
           <p:cNvSpPr txBox="1"/>
           <p:nvPr/>
         </p:nvSpPr>
@@ -1523,7 +1920,7 @@
       </p:sp>
       <p:sp>
         <p:nvSpPr>
-          <p:cNvPr id="100010" name="TextBox 2"/>
+          <p:cNvPr id="100015" name="TextBox 2"/>
           <p:cNvSpPr txBox="1"/>
           <p:nvPr/>
         </p:nvSpPr>
@@ -1570,7 +1967,7 @@
       </p:sp>
       <p:sp>
         <p:nvSpPr>
-          <p:cNvPr id="100011" name="TextBox 3"/>
+          <p:cNvPr id="100016" name="TextBox 3"/>
           <p:cNvSpPr txBox="1"/>
           <p:nvPr/>
         </p:nvSpPr>
@@ -1605,7 +2002,7 @@
 </p:sld>
 </file>
 
-<file path=ppt/slides/slide4.xml><?xml version="1.0" encoding="utf-8"?>
+<file path=ppt/slides/slide5.xml><?xml version="1.0" encoding="utf-8"?>
 <p:sld xmlns:p="http://schemas.openxmlformats.org/presentationml/2006/main">
   <p:cSld name="What slipped &amp; why">
     <p:bg>
@@ -1624,7 +2021,7 @@
       <p:grpSpPr/>
       <p:sp>
         <p:nvSpPr>
-          <p:cNvPr id="100012" name="TextBox 1"/>
+          <p:cNvPr id="100017" name="TextBox 1"/>
           <p:cNvSpPr txBox="1"/>
           <p:nvPr/>
         </p:nvSpPr>
@@ -1656,7 +2053,7 @@
       </p:sp>
       <p:sp>
         <p:nvSpPr>
-          <p:cNvPr id="100013" name="TextBox 2"/>
+          <p:cNvPr id="100018" name="TextBox 2"/>
           <p:cNvSpPr txBox="1"/>
           <p:nvPr/>
         </p:nvSpPr>
@@ -1715,7 +2112,7 @@
       </p:sp>
       <p:sp>
         <p:nvSpPr>
-          <p:cNvPr id="100014" name="TextBox 3"/>
+          <p:cNvPr id="100019" name="TextBox 3"/>
           <p:cNvSpPr txBox="1"/>
           <p:nvPr/>
         </p:nvSpPr>
@@ -1750,7 +2147,7 @@
 </p:sld>
 </file>
 
-<file path=ppt/slides/slide5.xml><?xml version="1.0" encoding="utf-8"?>
+<file path=ppt/slides/slide6.xml><?xml version="1.0" encoding="utf-8"?>
 <p:sld xmlns:p="http://schemas.openxmlformats.org/presentationml/2006/main">
   <p:cSld name="Risks into next period">
     <p:bg>
@@ -1769,7 +2166,7 @@
       <p:grpSpPr/>
       <p:sp>
         <p:nvSpPr>
-          <p:cNvPr id="100015" name="TextBox 1"/>
+          <p:cNvPr id="100020" name="TextBox 1"/>
           <p:cNvSpPr txBox="1"/>
           <p:nvPr/>
         </p:nvSpPr>
@@ -1801,7 +2198,7 @@
       </p:sp>
       <p:sp>
         <p:nvSpPr>
-          <p:cNvPr id="100016" name="TextBox 2"/>
+          <p:cNvPr id="100021" name="TextBox 2"/>
           <p:cNvSpPr txBox="1"/>
           <p:nvPr/>
         </p:nvSpPr>
@@ -1860,7 +2257,7 @@
       </p:sp>
       <p:sp>
         <p:nvSpPr>
-          <p:cNvPr id="100017" name="TextBox 3"/>
+          <p:cNvPr id="100022" name="TextBox 3"/>
           <p:cNvSpPr txBox="1"/>
           <p:nvPr/>
         </p:nvSpPr>
@@ -1895,7 +2292,7 @@
 </p:sld>
 </file>
 
-<file path=ppt/slides/slide6.xml><?xml version="1.0" encoding="utf-8"?>
+<file path=ppt/slides/slide7.xml><?xml version="1.0" encoding="utf-8"?>
 <p:sld xmlns:p="http://schemas.openxmlformats.org/presentationml/2006/main">
   <p:cSld name="Options &amp; recommendation">
     <p:bg>
@@ -1914,7 +2311,7 @@
       <p:grpSpPr/>
       <p:sp>
         <p:nvSpPr>
-          <p:cNvPr id="100018" name="TextBox 1"/>
+          <p:cNvPr id="100023" name="TextBox 1"/>
           <p:cNvSpPr txBox="1"/>
           <p:nvPr/>
         </p:nvSpPr>
@@ -1946,7 +2343,7 @@
       </p:sp>
       <p:sp>
         <p:nvSpPr>
-          <p:cNvPr id="100019" name="TextBox 2"/>
+          <p:cNvPr id="100024" name="TextBox 2"/>
           <p:cNvSpPr txBox="1"/>
           <p:nvPr/>
         </p:nvSpPr>
@@ -1978,7 +2375,7 @@
       </p:sp>
       <p:graphicFrame>
         <p:nvGraphicFramePr>
-          <p:cNvPr id="100020" name="Table 1"/>
+          <p:cNvPr id="100025" name="Table 1"/>
           <p:cNvGraphicFramePr/>
           <p:nvPr/>
         </p:nvGraphicFramePr>
@@ -2285,7 +2682,7 @@
       </p:graphicFrame>
       <p:sp>
         <p:nvSpPr>
-          <p:cNvPr id="100021" name="TextBox 3"/>
+          <p:cNvPr id="100026" name="TextBox 3"/>
           <p:cNvSpPr txBox="1"/>
           <p:nvPr/>
         </p:nvSpPr>
@@ -2320,7 +2717,7 @@
 </p:sld>
 </file>
 
-<file path=ppt/slides/slide7.xml><?xml version="1.0" encoding="utf-8"?>
+<file path=ppt/slides/slide8.xml><?xml version="1.0" encoding="utf-8"?>
 <p:sld xmlns:p="http://schemas.openxmlformats.org/presentationml/2006/main">
   <p:cSld name="Decision &amp; ask">
     <p:bg>
@@ -2339,7 +2736,7 @@
       <p:grpSpPr/>
       <p:sp>
         <p:nvSpPr>
-          <p:cNvPr id="100022" name="TextBox 1"/>
+          <p:cNvPr id="100027" name="TextBox 1"/>
           <p:cNvSpPr txBox="1"/>
           <p:nvPr/>
         </p:nvSpPr>
@@ -2371,7 +2768,7 @@
       </p:sp>
       <p:sp>
         <p:nvSpPr>
-          <p:cNvPr id="100023" name="TextBox 2"/>
+          <p:cNvPr id="100028" name="TextBox 2"/>
           <p:cNvSpPr txBox="1"/>
           <p:nvPr/>
         </p:nvSpPr>
@@ -2403,7 +2800,7 @@
       </p:sp>
       <p:sp>
         <p:nvSpPr>
-          <p:cNvPr id="100024" name="TextBox 3"/>
+          <p:cNvPr id="100029" name="TextBox 3"/>
           <p:cNvSpPr txBox="1"/>
           <p:nvPr/>
         </p:nvSpPr>
@@ -2462,7 +2859,7 @@
       </p:sp>
       <p:sp>
         <p:nvSpPr>
-          <p:cNvPr id="100025" name="TextBox 4"/>
+          <p:cNvPr id="100030" name="TextBox 4"/>
           <p:cNvSpPr txBox="1"/>
           <p:nvPr/>
         </p:nvSpPr>

--- a/skills/presentations/assets/pptx/templates/09-period-end-review.pptx
+++ b/skills/presentations/assets/pptx/templates/09-period-end-review.pptx
@@ -5,17 +5,17 @@
     <p:sldMasterId xmlns:r="http://schemas.openxmlformats.org/officeDocument/2006/relationships" id="2147483648" r:id="rId1"/>
   </p:sldMasterIdLst>
   <p:notesMasterIdLst>
-    <p:notesMasterId r:id="R5a8bdc522ff74316"/>
+    <p:notesMasterId r:id="R1f8b0310394e4f34"/>
   </p:notesMasterIdLst>
   <p:sldIdLst>
-    <p:sldId id="256" r:id="R38989ba8a2fc4c0b"/>
-    <p:sldId id="257" r:id="R138bb6f96ad34bc1"/>
-    <p:sldId id="258" r:id="R0bbb62c3219d44f4"/>
-    <p:sldId id="259" r:id="R50f5e4a537774e8c"/>
-    <p:sldId id="260" r:id="Rb066a54198364fd4"/>
-    <p:sldId id="261" r:id="R9e6ca063702c40e6"/>
-    <p:sldId id="262" r:id="R9e05eeb79a8e4ba6"/>
-    <p:sldId id="263" r:id="Rb7dd4b3922494d00"/>
+    <p:sldId id="256" r:id="Refff5078cf434de6"/>
+    <p:sldId id="257" r:id="Rd7b5fbe5a1cc4054"/>
+    <p:sldId id="258" r:id="Rcaea5386d59740d6"/>
+    <p:sldId id="259" r:id="R2749b48f001a49f0"/>
+    <p:sldId id="260" r:id="R80b9b7c9e498498e"/>
+    <p:sldId id="261" r:id="Rb76024dfe0624a8d"/>
+    <p:sldId id="262" r:id="R4fc197c8a81b4f04"/>
+    <p:sldId id="263" r:id="Rd06050e1909f4aae"/>
   </p:sldIdLst>
   <p:sldSz cx="12192000" cy="6858000"/>
   <p:notesSz cx="6858000" cy="9144000"/>
@@ -1615,7 +1615,19 @@
                 <a:latin typeface="Calibri"/>
                 <a:ea typeface="Calibri"/>
               </a:rPr>
-              <a:t>In-repo: skills/presentations/classic-public-cases.md</a:t>
+              <a:t>CONTENT TEMPLATE ONLY — do not copy visual design (colors, margins, fonts) as a brand system.</a:t>
+            </a:r>
+          </a:p>
+          <a:p xmlns:a="http://schemas.openxmlformats.org/drawingml/2006/main">
+            <a:r>
+              <a:rPr lang="en-US" sz="1500" b="0">
+                <a:solidFill>
+                  <a:srgbClr val="1A202C"/>
+                </a:solidFill>
+                <a:latin typeface="Calibri"/>
+                <a:ea typeface="Calibri"/>
+              </a:rPr>
+              <a:t>In-repo: skills/presentations/classic-public-cases.md · assets/README.md (agent notice)</a:t>
             </a:r>
           </a:p>
         </p:txBody>
